--- a/docs/examples/zh_campus.pptx
+++ b/docs/examples/zh_campus.pptx
@@ -990,7 +990,7 @@
         <p:spPr>
           <a:xfrm>
             <a:off x="381000" y="1035050"/>
-            <a:ext cx="1008916" cy="215900"/>
+            <a:ext cx="1068232" cy="215900"/>
           </a:xfrm>
           <a:prstGeom prst="roundRect">
             <a:avLst>
@@ -1038,7 +1038,7 @@
         <p:spPr>
           <a:xfrm>
             <a:off x="610870" y="1035050"/>
-            <a:ext cx="779046" cy="215900"/>
+            <a:ext cx="838362" cy="215900"/>
           </a:xfrm>
           <a:prstGeom prst="rect">
             <a:avLst/>
@@ -1047,7 +1047,7 @@
           <a:ln/>
         </p:spPr>
         <p:txBody>
-          <a:bodyPr wrap="square" lIns="0" tIns="0" rIns="0" bIns="0" rtlCol="0" anchor="ctr"/>
+          <a:bodyPr wrap="none" lIns="0" tIns="0" rIns="0" bIns="0" rtlCol="0" anchor="ctr"/>
           <a:lstStyle/>
           <a:p>
             <a:pPr algn="l" indent="0" marL="0">
@@ -1079,8 +1079,8 @@
         </p:nvSpPr>
         <p:spPr>
           <a:xfrm>
-            <a:off x="1440716" y="1035050"/>
-            <a:ext cx="1540658" cy="215900"/>
+            <a:off x="1500032" y="1035050"/>
+            <a:ext cx="1631879" cy="215900"/>
           </a:xfrm>
           <a:prstGeom prst="roundRect">
             <a:avLst>
@@ -1111,7 +1111,7 @@
         </p:blipFill>
         <p:spPr>
           <a:xfrm>
-            <a:off x="1520726" y="1089025"/>
+            <a:off x="1580042" y="1089025"/>
             <a:ext cx="107950" cy="107950"/>
           </a:xfrm>
           <a:prstGeom prst="rect">
@@ -1127,8 +1127,8 @@
         </p:nvSpPr>
         <p:spPr>
           <a:xfrm>
-            <a:off x="1670586" y="1035050"/>
-            <a:ext cx="1310788" cy="215900"/>
+            <a:off x="1729902" y="1035050"/>
+            <a:ext cx="1402009" cy="215900"/>
           </a:xfrm>
           <a:prstGeom prst="rect">
             <a:avLst/>
@@ -1137,7 +1137,7 @@
           <a:ln/>
         </p:spPr>
         <p:txBody>
-          <a:bodyPr wrap="square" lIns="0" tIns="0" rIns="0" bIns="0" rtlCol="0" anchor="ctr"/>
+          <a:bodyPr wrap="none" lIns="0" tIns="0" rIns="0" bIns="0" rtlCol="0" anchor="ctr"/>
           <a:lstStyle/>
           <a:p>
             <a:pPr algn="l" indent="0" marL="0">
@@ -1179,8 +1179,8 @@
         </p:blipFill>
         <p:spPr>
           <a:xfrm>
-            <a:off x="1440716" y="1035050"/>
-            <a:ext cx="1540658" cy="215900"/>
+            <a:off x="1500032" y="1035050"/>
+            <a:ext cx="1631879" cy="215900"/>
           </a:xfrm>
           <a:prstGeom prst="rect">
             <a:avLst/>
@@ -1195,8 +1195,8 @@
         </p:nvSpPr>
         <p:spPr>
           <a:xfrm>
-            <a:off x="3032175" y="1035050"/>
-            <a:ext cx="1344026" cy="215900"/>
+            <a:off x="3182711" y="1035050"/>
+            <a:ext cx="1423448" cy="215900"/>
           </a:xfrm>
           <a:prstGeom prst="roundRect">
             <a:avLst>
@@ -1227,7 +1227,7 @@
         </p:blipFill>
         <p:spPr>
           <a:xfrm>
-            <a:off x="3112185" y="1089025"/>
+            <a:off x="3262721" y="1089025"/>
             <a:ext cx="107950" cy="107950"/>
           </a:xfrm>
           <a:prstGeom prst="rect">
@@ -1243,8 +1243,8 @@
         </p:nvSpPr>
         <p:spPr>
           <a:xfrm>
-            <a:off x="3262045" y="1035050"/>
-            <a:ext cx="1114156" cy="215900"/>
+            <a:off x="3412581" y="1035050"/>
+            <a:ext cx="1193578" cy="215900"/>
           </a:xfrm>
           <a:prstGeom prst="rect">
             <a:avLst/>
@@ -1253,7 +1253,7 @@
           <a:ln/>
         </p:spPr>
         <p:txBody>
-          <a:bodyPr wrap="square" lIns="0" tIns="0" rIns="0" bIns="0" rtlCol="0" anchor="ctr"/>
+          <a:bodyPr wrap="none" lIns="0" tIns="0" rIns="0" bIns="0" rtlCol="0" anchor="ctr"/>
           <a:lstStyle/>
           <a:p>
             <a:pPr algn="l" indent="0" marL="0">
@@ -1295,8 +1295,8 @@
         </p:blipFill>
         <p:spPr>
           <a:xfrm>
-            <a:off x="3032175" y="1035050"/>
-            <a:ext cx="1344026" cy="215900"/>
+            <a:off x="3182711" y="1035050"/>
+            <a:ext cx="1423448" cy="215900"/>
           </a:xfrm>
           <a:prstGeom prst="rect">
             <a:avLst/>
@@ -1311,8 +1311,8 @@
         </p:nvSpPr>
         <p:spPr>
           <a:xfrm>
-            <a:off x="4427001" y="1035050"/>
-            <a:ext cx="642620" cy="215900"/>
+            <a:off x="4656959" y="1035050"/>
+            <a:ext cx="679958" cy="215900"/>
           </a:xfrm>
           <a:prstGeom prst="roundRect">
             <a:avLst>
@@ -1343,7 +1343,7 @@
         </p:blipFill>
         <p:spPr>
           <a:xfrm>
-            <a:off x="4507011" y="1089025"/>
+            <a:off x="4736969" y="1089025"/>
             <a:ext cx="107950" cy="107950"/>
           </a:xfrm>
           <a:prstGeom prst="rect">
@@ -1359,8 +1359,8 @@
         </p:nvSpPr>
         <p:spPr>
           <a:xfrm>
-            <a:off x="4656871" y="1035050"/>
-            <a:ext cx="412750" cy="215900"/>
+            <a:off x="4886829" y="1035050"/>
+            <a:ext cx="450088" cy="215900"/>
           </a:xfrm>
           <a:prstGeom prst="rect">
             <a:avLst/>
@@ -1369,7 +1369,7 @@
           <a:ln/>
         </p:spPr>
         <p:txBody>
-          <a:bodyPr wrap="square" lIns="0" tIns="0" rIns="0" bIns="0" rtlCol="0" anchor="ctr"/>
+          <a:bodyPr wrap="none" lIns="0" tIns="0" rIns="0" bIns="0" rtlCol="0" anchor="ctr"/>
           <a:lstStyle/>
           <a:p>
             <a:pPr algn="l" indent="0" marL="0">
@@ -1411,8 +1411,8 @@
         </p:blipFill>
         <p:spPr>
           <a:xfrm>
-            <a:off x="4427001" y="1035050"/>
-            <a:ext cx="642620" cy="215900"/>
+            <a:off x="4656959" y="1035050"/>
+            <a:ext cx="679958" cy="215900"/>
           </a:xfrm>
           <a:prstGeom prst="rect">
             <a:avLst/>
@@ -1502,7 +1502,7 @@
             <a:off x="6263640" y="444500"/>
             <a:ext cx="792480" cy="792480"/>
           </a:xfrm>
-          <a:prstGeom prst="rect">
+          <a:prstGeom prst="ellipse">
             <a:avLst/>
           </a:prstGeom>
         </p:spPr>
